--- a/assets/powerpoints/module-n3-vetements/C4-celui-ci-celui-la.pptx
+++ b/assets/powerpoints/module-n3-vetements/C4-celui-ci-celui-la.pptx
@@ -9732,7 +9732,25 @@
                 </a:solidFill>
                 <a:latin typeface="Verdana"/>
               </a:rPr>
-              <a:t>&lt;b&gt;ce&lt;/b&gt; manteau · &lt;b&gt;celui-ci&lt;/b&gt;</a:t>
+              <a:t>ce</a:t>
+            </a:r>
+            <a:r>
+              <a:rPr sz="3400" b="0" i="0">
+                <a:solidFill>
+                  <a:srgbClr val="17181A"/>
+                </a:solidFill>
+                <a:latin typeface="Verdana"/>
+              </a:rPr>
+              <a:t> manteau · </a:t>
+            </a:r>
+            <a:r>
+              <a:rPr sz="3400" b="1" i="0">
+                <a:solidFill>
+                  <a:srgbClr val="17181A"/>
+                </a:solidFill>
+                <a:latin typeface="Verdana"/>
+              </a:rPr>
+              <a:t>celui-ci</a:t>
             </a:r>
           </a:p>
         </p:txBody>
